--- a/out/kit-wine.pptx
+++ b/out/kit-wine.pptx
@@ -4,6 +4,9 @@
   <p:sldMasterIdLst>
     <p:sldMasterId id="2147483648" r:id="rId1"/>
   </p:sldMasterIdLst>
+  <p:notesMasterIdLst>
+    <p:notesMasterId r:id="rId14"/>
+  </p:notesMasterIdLst>
   <p:sldIdLst>
     <p:sldId id="256" r:id="rId2"/>
     <p:sldId id="257" r:id="rId3"/>
@@ -18,9 +21,6 @@
     <p:sldId id="266" r:id="rId12"/>
     <p:sldId id="267" r:id="rId13"/>
   </p:sldIdLst>
-  <p:notesMasterIdLst>
-    <p:notesMasterId r:id="rId14"/>
-  </p:notesMasterIdLst>
   <p:sldSz cx="12192000" cy="6858000"/>
   <p:notesSz cx="6858000" cy="12192000"/>
   <p:defaultTextStyle>
@@ -2133,7 +2133,7 @@
             <a:prstDash val="solid"/>
           </a:ln>
           <a:effectLst>
-            <a:outerShdw blurRad="88900" dist="25400" dir="5400000" sx="100000" sy="100000" algn="ctr" rotWithShape="0">
+            <a:outerShdw blurRad="84836" dist="24257" dir="5400000" sx="100000" sy="100000" algn="ctr" rotWithShape="0">
               <a:srgbClr val="000000">
                 <a:alpha val="25000"/>
               </a:srgbClr>
@@ -3731,7 +3731,7 @@
             <a:prstDash val="solid"/>
           </a:ln>
           <a:effectLst>
-            <a:outerShdw blurRad="88900" dist="25400" dir="5400000" sx="100000" sy="100000" algn="ctr" rotWithShape="0">
+            <a:outerShdw blurRad="76835" dist="21971" dir="5400000" sx="100000" sy="100000" algn="ctr" rotWithShape="0">
               <a:srgbClr val="000000">
                 <a:alpha val="25000"/>
               </a:srgbClr>
@@ -5541,9 +5541,9 @@
               <a:prstDash val="solid"/>
             </a:ln>
             <a:effectLst>
-              <a:outerShdw blurRad="203200" dist="25400" dir="5400000" sx="102000" sy="102000" algn="ctr" rotWithShape="0">
+              <a:outerShdw blurRad="85344" dist="15240" dir="5400000" sx="100840" sy="100840" algn="ctr" rotWithShape="0">
                 <a:srgbClr val="000000">
-                  <a:alpha val="32000"/>
+                  <a:alpha val="28000"/>
                 </a:srgbClr>
               </a:outerShdw>
             </a:effectLst>
@@ -5701,9 +5701,9 @@
               <a:prstDash val="solid"/>
             </a:ln>
             <a:effectLst>
-              <a:outerShdw blurRad="203200" dist="25400" dir="5400000" sx="102000" sy="102000" algn="ctr" rotWithShape="0">
+              <a:outerShdw blurRad="85344" dist="15240" dir="5400000" sx="100840" sy="100840" algn="ctr" rotWithShape="0">
                 <a:srgbClr val="000000">
-                  <a:alpha val="32000"/>
+                  <a:alpha val="28000"/>
                 </a:srgbClr>
               </a:outerShdw>
             </a:effectLst>
@@ -7342,9 +7342,6 @@
               </a:rPr>
               <a:t>酒紅精品</a:t>
             </a:r>
-            <a:pPr algn="l" indent="0" marL="0">
-              <a:buNone/>
-            </a:pPr>
             <a:r>
               <a:rPr lang="en-US" sz="900" dirty="0">
                 <a:solidFill>
@@ -8795,9 +8792,6 @@
               </a:rPr>
               <a:t>酒紅精品</a:t>
             </a:r>
-            <a:pPr algn="l" indent="0" marL="0">
-              <a:buNone/>
-            </a:pPr>
             <a:r>
               <a:rPr lang="en-US" sz="900" dirty="0">
                 <a:solidFill>
@@ -10756,9 +10750,6 @@
               </a:rPr>
               <a:t>組織</a:t>
             </a:r>
-            <a:pPr algn="ctr" indent="0" marL="0">
-              <a:buNone/>
-            </a:pPr>
             <a:r>
               <a:rPr lang="en-US" sz="1100" dirty="0">
                 <a:solidFill>
@@ -11260,9 +11251,6 @@
               </a:rPr>
               <a:t>酒紅精品</a:t>
             </a:r>
-            <a:pPr algn="l" indent="0" marL="0">
-              <a:buNone/>
-            </a:pPr>
             <a:r>
               <a:rPr lang="en-US" sz="900" dirty="0">
                 <a:solidFill>
@@ -14416,9 +14404,6 @@
               </a:rPr>
               <a:t>酒紅精品</a:t>
             </a:r>
-            <a:pPr algn="l" indent="0" marL="0">
-              <a:buNone/>
-            </a:pPr>
             <a:r>
               <a:rPr lang="en-US" sz="900" dirty="0">
                 <a:solidFill>
@@ -14678,9 +14663,6 @@
               </a:rPr>
               <a:t>三步驟流程</a:t>
             </a:r>
-            <a:pPr algn="l" indent="0" marL="0">
-              <a:buNone/>
-            </a:pPr>
             <a:r>
               <a:rPr lang="en-US" sz="800" dirty="0">
                 <a:solidFill>
@@ -15103,9 +15085,6 @@
               </a:rPr>
               <a:t>判斷分岔（是／否）</a:t>
             </a:r>
-            <a:pPr algn="l" indent="0" marL="0">
-              <a:buNone/>
-            </a:pPr>
             <a:r>
               <a:rPr lang="en-US" sz="800" dirty="0">
                 <a:solidFill>
@@ -15553,9 +15532,6 @@
               </a:rPr>
               <a:t>例外退回路徑</a:t>
             </a:r>
-            <a:pPr algn="l" indent="0" marL="0">
-              <a:buNone/>
-            </a:pPr>
             <a:r>
               <a:rPr lang="en-US" sz="800" dirty="0">
                 <a:solidFill>
@@ -15947,9 +15923,6 @@
               </a:rPr>
               <a:t>審核迴圈</a:t>
             </a:r>
-            <a:pPr algn="l" indent="0" marL="0">
-              <a:buNone/>
-            </a:pPr>
             <a:r>
               <a:rPr lang="en-US" sz="800" dirty="0">
                 <a:solidFill>
@@ -16380,9 +16353,6 @@
               </a:rPr>
               <a:t>泳道（雙道）</a:t>
             </a:r>
-            <a:pPr algn="l" indent="0" marL="0">
-              <a:buNone/>
-            </a:pPr>
             <a:r>
               <a:rPr lang="en-US" sz="800" dirty="0">
                 <a:solidFill>
@@ -16952,9 +16922,6 @@
               </a:rPr>
               <a:t>平行分流／合流</a:t>
             </a:r>
-            <a:pPr algn="l" indent="0" marL="0">
-              <a:buNone/>
-            </a:pPr>
             <a:r>
               <a:rPr lang="en-US" sz="800" dirty="0">
                 <a:solidFill>
@@ -17456,9 +17423,6 @@
               </a:rPr>
               <a:t>輸入→處理→輸出</a:t>
             </a:r>
-            <a:pPr algn="l" indent="0" marL="0">
-              <a:buNone/>
-            </a:pPr>
             <a:r>
               <a:rPr lang="en-US" sz="800" dirty="0">
                 <a:solidFill>
@@ -17900,9 +17864,6 @@
               </a:rPr>
               <a:t>前後對照</a:t>
             </a:r>
-            <a:pPr algn="l" indent="0" marL="0">
-              <a:buNone/>
-            </a:pPr>
             <a:r>
               <a:rPr lang="en-US" sz="800" dirty="0">
                 <a:solidFill>
@@ -18055,9 +18016,6 @@
                 </a:rPr>
                 <a:t>現況 </a:t>
               </a:r>
-              <a:pPr algn="l" indent="0" marL="0">
-                <a:buNone/>
-              </a:pPr>
               <a:r>
                 <a:rPr lang="en-US" sz="800" dirty="0">
                   <a:solidFill>
@@ -18229,9 +18187,6 @@
                 </a:rPr>
                 <a:t>改善後 </a:t>
               </a:r>
-              <a:pPr algn="l" indent="0" marL="0">
-                <a:buNone/>
-              </a:pPr>
               <a:r>
                 <a:rPr lang="en-US" sz="800" dirty="0">
                   <a:solidFill>
@@ -18345,9 +18300,6 @@
               </a:rPr>
               <a:t>酒紅精品</a:t>
             </a:r>
-            <a:pPr algn="l" indent="0" marL="0">
-              <a:buNone/>
-            </a:pPr>
             <a:r>
               <a:rPr lang="en-US" sz="900" dirty="0">
                 <a:solidFill>
@@ -19635,9 +19587,6 @@
               </a:rPr>
               <a:t>大標題文字</a:t>
             </a:r>
-            <a:pPr algn="l" indent="0" marL="0">
-              <a:buNone/>
-            </a:pPr>
             <a:r>
               <a:rPr lang="en-US" sz="1000" dirty="0">
                 <a:solidFill>
@@ -19688,9 +19637,6 @@
               </a:rPr>
               <a:t>副標題・細字主色</a:t>
             </a:r>
-            <a:pPr algn="l" indent="0" marL="0">
-              <a:buNone/>
-            </a:pPr>
             <a:r>
               <a:rPr lang="en-US" sz="1000" dirty="0">
                 <a:solidFill>
@@ -19741,9 +19687,6 @@
               </a:rPr>
               <a:t>標籤與卡片標題</a:t>
             </a:r>
-            <a:pPr algn="l" indent="0" marL="0">
-              <a:buNone/>
-            </a:pPr>
             <a:r>
               <a:rPr lang="en-US" sz="1000" dirty="0">
                 <a:solidFill>
@@ -19794,9 +19737,6 @@
               </a:rPr>
               <a:t>內文說明文字，灰色、行距寬鬆</a:t>
             </a:r>
-            <a:pPr algn="l" indent="0" marL="0">
-              <a:buNone/>
-            </a:pPr>
             <a:r>
               <a:rPr lang="en-US" sz="1000" dirty="0">
                 <a:solidFill>
@@ -21384,9 +21324,6 @@
               </a:rPr>
               <a:t>酒紅精品</a:t>
             </a:r>
-            <a:pPr algn="l" indent="0" marL="0">
-              <a:buNone/>
-            </a:pPr>
             <a:r>
               <a:rPr lang="en-US" sz="900" dirty="0">
                 <a:solidFill>
@@ -21681,9 +21618,6 @@
               </a:rPr>
               <a:t>標題＋內文</a:t>
             </a:r>
-            <a:pPr algn="l" indent="0" marL="0">
-              <a:buNone/>
-            </a:pPr>
             <a:r>
               <a:rPr lang="en-US" sz="1000" b="1" dirty="0">
                 <a:solidFill>
@@ -22951,9 +22885,6 @@
               </a:rPr>
               <a:t>酒紅精品</a:t>
             </a:r>
-            <a:pPr algn="l" indent="0" marL="0">
-              <a:buNone/>
-            </a:pPr>
             <a:r>
               <a:rPr lang="en-US" sz="900" dirty="0">
                 <a:solidFill>
@@ -24884,9 +24815,6 @@
               </a:rPr>
               <a:t>酒紅精品</a:t>
             </a:r>
-            <a:pPr algn="l" indent="0" marL="0">
-              <a:buNone/>
-            </a:pPr>
             <a:r>
               <a:rPr lang="en-US" sz="900" dirty="0">
                 <a:solidFill>
@@ -26317,9 +26245,6 @@
               </a:rPr>
               <a:t>酒紅精品</a:t>
             </a:r>
-            <a:pPr algn="l" indent="0" marL="0">
-              <a:buNone/>
-            </a:pPr>
             <a:r>
               <a:rPr lang="en-US" sz="900" dirty="0">
                 <a:solidFill>
@@ -28633,9 +28558,6 @@
               </a:rPr>
               <a:t>酒紅精品</a:t>
             </a:r>
-            <a:pPr algn="l" indent="0" marL="0">
-              <a:buNone/>
-            </a:pPr>
             <a:r>
               <a:rPr lang="en-US" sz="900" dirty="0">
                 <a:solidFill>
@@ -30212,9 +30134,6 @@
               </a:rPr>
               <a:t>酒紅精品</a:t>
             </a:r>
-            <a:pPr algn="l" indent="0" marL="0">
-              <a:buNone/>
-            </a:pPr>
             <a:r>
               <a:rPr lang="en-US" sz="900" dirty="0">
                 <a:solidFill>
@@ -32319,9 +32238,6 @@
               </a:rPr>
               <a:t>酒紅精品</a:t>
             </a:r>
-            <a:pPr algn="l" indent="0" marL="0">
-              <a:buNone/>
-            </a:pPr>
             <a:r>
               <a:rPr lang="en-US" sz="900" dirty="0">
                 <a:solidFill>
